--- a/workshops/EST-Napoli_Innovation_Festival/PRG32_Breakout_Construction_Kit.pptx
+++ b/workshops/EST-Napoli_Innovation_Festival/PRG32_Breakout_Construction_Kit.pptx
@@ -165,7 +165,7 @@
   <p:extLst>
     <p:ext uri="{521415D9-36F7-43E2-AB2F-B90AF26B5E84}">
       <p14:sectionLst xmlns:p14="http://schemas.microsoft.com/office/powerpoint/2010/main">
-        <p14:section name="Opening" id="{356d7448-fda0-f6c6-23ae-a3050283dc61}">
+        <p14:section name="Opening" id="{f2e49f26-fd97-17bf-30f6-dab3b091b5b5}">
           <p14:sldIdLst>
             <p14:sldId id="256"/>
             <p14:sldId id="257"/>
@@ -173,7 +173,7 @@
             <p14:sldId id="259"/>
           </p14:sldIdLst>
         </p14:section>
-        <p14:section name="L'idea" id="{d79f907d-069d-9af9-4a84-c803068ff6b1}">
+        <p14:section name="L'idea" id="{8a639d57-9c07-dcd9-9678-8fda72cff810}">
           <p14:sldIdLst>
             <p14:sldId id="260"/>
             <p14:sldId id="261"/>
@@ -185,7 +185,7 @@
             <p14:sldId id="267"/>
           </p14:sldIdLst>
         </p14:section>
-        <p14:section name="La piattaforma PRG32" id="{2fb32db4-7b51-9f39-3aac-ba56ff6bcb00}">
+        <p14:section name="La piattaforma PRG32" id="{17fbaa0e-b257-e1fd-2bf1-c7751a405d1a}">
           <p14:sldIdLst>
             <p14:sldId id="268"/>
             <p14:sldId id="269"/>
@@ -197,7 +197,7 @@
             <p14:sldId id="275"/>
           </p14:sldIdLst>
         </p14:section>
-        <p14:section name="Il ciclo init, update, draw" id="{2ff8e378-f519-862b-779c-d4a4d4e1d8b1}">
+        <p14:section name="Il ciclo init, update, draw" id="{f947dae2-4754-8d39-44fc-c795cfc26d00}">
           <p14:sldIdLst>
             <p14:sldId id="276"/>
             <p14:sldId id="277"/>
@@ -210,7 +210,7 @@
             <p14:sldId id="284"/>
           </p14:sldIdLst>
         </p14:section>
-        <p14:section name="Breakout con i blocchi" id="{5d4c6764-7044-bd32-814d-bcdf21b9ee34}">
+        <p14:section name="Breakout con i blocchi" id="{d5c091a3-c6f3-0c8d-a0dc-54c4a902ca04}">
           <p14:sldIdLst>
             <p14:sldId id="285"/>
             <p14:sldId id="286"/>
@@ -235,7 +235,7 @@
             <p14:sldId id="305"/>
           </p14:sldIdLst>
         </p14:section>
-        <p14:section name="Sotto i blocchi" id="{dcfaf6c1-e8ac-e422-190d-ceeac88126f3}">
+        <p14:section name="Sotto i blocchi" id="{c1cd9b41-5363-8cdc-e028-8eb7c774d37b}">
           <p14:sldIdLst>
             <p14:sldId id="306"/>
             <p14:sldId id="307"/>
@@ -243,7 +243,7 @@
             <p14:sldId id="309"/>
           </p14:sldIdLst>
         </p14:section>
-        <p14:section name="Sfide finali" id="{9a7d3796-7142-446a-418f-d203f4962396}">
+        <p14:section name="Sfide finali" id="{9b352323-7838-e4af-1794-348845ad26be}">
           <p14:sldIdLst>
             <p14:sldId id="310"/>
             <p14:sldId id="311"/>
@@ -251,7 +251,7 @@
             <p14:sldId id="313"/>
           </p14:sldIdLst>
         </p14:section>
-        <p14:section name="Closing" id="{d0a4cd81-a816-859a-8b91-b2438fb4a4d3}">
+        <p14:section name="Closing" id="{c988d620-18b7-3cdd-d00d-302ad95b8ab2}">
           <p14:sldIdLst>
             <p14:sldId id="314"/>
           </p14:sldIdLst>
@@ -12346,7 +12346,7 @@
               <a:buNone/>
             </a:pPr>
             <a:r>
-              <a:rPr lang="en-US" sz="1022" dirty="0">
+              <a:rPr lang="en-US" sz="1398" dirty="0">
                 <a:solidFill>
                   <a:srgbClr val="5B6B78"/>
                 </a:solidFill>
@@ -12356,7 +12356,7 @@
               </a:rPr>
               <a:t>+0</a:t>
             </a:r>
-            <a:endParaRPr lang="en-US" sz="1022" dirty="0"/>
+            <a:endParaRPr lang="en-US" sz="1398" dirty="0"/>
           </a:p>
         </p:txBody>
       </p:sp>
@@ -12391,7 +12391,7 @@
               <a:buNone/>
             </a:pPr>
             <a:r>
-              <a:rPr lang="en-US" sz="1222" b="1" dirty="0">
+              <a:rPr lang="en-US" sz="1598" b="1" dirty="0">
                 <a:solidFill>
                   <a:srgbClr val="FFFFFF"/>
                 </a:solidFill>
@@ -12401,7 +12401,7 @@
               </a:rPr>
               <a:t>PRG2</a:t>
             </a:r>
-            <a:endParaRPr lang="en-US" sz="1222" dirty="0"/>
+            <a:endParaRPr lang="en-US" sz="1598" dirty="0"/>
           </a:p>
         </p:txBody>
       </p:sp>
@@ -12430,7 +12430,7 @@
               <a:buNone/>
             </a:pPr>
             <a:r>
-              <a:rPr lang="en-US" sz="1022" dirty="0">
+              <a:rPr lang="en-US" sz="1398" dirty="0">
                 <a:solidFill>
                   <a:srgbClr val="5B6B78"/>
                 </a:solidFill>
@@ -12440,7 +12440,7 @@
               </a:rPr>
               <a:t>4 byte</a:t>
             </a:r>
-            <a:endParaRPr lang="en-US" sz="1022" dirty="0"/>
+            <a:endParaRPr lang="en-US" sz="1398" dirty="0"/>
           </a:p>
         </p:txBody>
       </p:sp>
@@ -12469,7 +12469,7 @@
               <a:buNone/>
             </a:pPr>
             <a:r>
-              <a:rPr lang="en-US" sz="1222" dirty="0">
+              <a:rPr lang="en-US" sz="1598" dirty="0">
                 <a:solidFill>
                   <a:srgbClr val="1B2530"/>
                 </a:solidFill>
@@ -12479,7 +12479,7 @@
               </a:rPr>
               <a:t>firma: "sono una cartuccia PRG32"</a:t>
             </a:r>
-            <a:endParaRPr lang="en-US" sz="1222" dirty="0"/>
+            <a:endParaRPr lang="en-US" sz="1598" dirty="0"/>
           </a:p>
         </p:txBody>
       </p:sp>
@@ -12508,7 +12508,7 @@
               <a:buNone/>
             </a:pPr>
             <a:r>
-              <a:rPr lang="en-US" sz="1022" dirty="0">
+              <a:rPr lang="en-US" sz="1398" dirty="0">
                 <a:solidFill>
                   <a:srgbClr val="5B6B78"/>
                 </a:solidFill>
@@ -12518,7 +12518,7 @@
               </a:rPr>
               <a:t>+4</a:t>
             </a:r>
-            <a:endParaRPr lang="en-US" sz="1022" dirty="0"/>
+            <a:endParaRPr lang="en-US" sz="1398" dirty="0"/>
           </a:p>
         </p:txBody>
       </p:sp>
@@ -12553,7 +12553,7 @@
               <a:buNone/>
             </a:pPr>
             <a:r>
-              <a:rPr lang="en-US" sz="1222" b="1" dirty="0">
+              <a:rPr lang="en-US" sz="1598" b="1" dirty="0">
                 <a:solidFill>
                   <a:srgbClr val="FFFFFF"/>
                 </a:solidFill>
@@ -12563,7 +12563,7 @@
               </a:rPr>
               <a:t>versione ABI</a:t>
             </a:r>
-            <a:endParaRPr lang="en-US" sz="1222" dirty="0"/>
+            <a:endParaRPr lang="en-US" sz="1598" dirty="0"/>
           </a:p>
         </p:txBody>
       </p:sp>
@@ -12592,7 +12592,7 @@
               <a:buNone/>
             </a:pPr>
             <a:r>
-              <a:rPr lang="en-US" sz="1022" dirty="0">
+              <a:rPr lang="en-US" sz="1398" dirty="0">
                 <a:solidFill>
                   <a:srgbClr val="5B6B78"/>
                 </a:solidFill>
@@ -12602,7 +12602,7 @@
               </a:rPr>
               <a:t>4 byte</a:t>
             </a:r>
-            <a:endParaRPr lang="en-US" sz="1022" dirty="0"/>
+            <a:endParaRPr lang="en-US" sz="1398" dirty="0"/>
           </a:p>
         </p:txBody>
       </p:sp>
@@ -12631,7 +12631,7 @@
               <a:buNone/>
             </a:pPr>
             <a:r>
-              <a:rPr lang="en-US" sz="1222" dirty="0">
+              <a:rPr lang="en-US" sz="1598" dirty="0">
                 <a:solidFill>
                   <a:srgbClr val="1B2530"/>
                 </a:solidFill>
@@ -12641,7 +12641,7 @@
               </a:rPr>
               <a:t>quale tabella di funzioni si aspetta</a:t>
             </a:r>
-            <a:endParaRPr lang="en-US" sz="1222" dirty="0"/>
+            <a:endParaRPr lang="en-US" sz="1598" dirty="0"/>
           </a:p>
         </p:txBody>
       </p:sp>
@@ -12670,7 +12670,7 @@
               <a:buNone/>
             </a:pPr>
             <a:r>
-              <a:rPr lang="en-US" sz="1022" dirty="0">
+              <a:rPr lang="en-US" sz="1398" dirty="0">
                 <a:solidFill>
                   <a:srgbClr val="5B6B78"/>
                 </a:solidFill>
@@ -12680,7 +12680,7 @@
               </a:rPr>
               <a:t>+8</a:t>
             </a:r>
-            <a:endParaRPr lang="en-US" sz="1022" dirty="0"/>
+            <a:endParaRPr lang="en-US" sz="1398" dirty="0"/>
           </a:p>
         </p:txBody>
       </p:sp>
@@ -12715,7 +12715,7 @@
               <a:buNone/>
             </a:pPr>
             <a:r>
-              <a:rPr lang="en-US" sz="1222" b="1" dirty="0">
+              <a:rPr lang="en-US" sz="1598" b="1" dirty="0">
                 <a:solidFill>
                   <a:srgbClr val="FFFFFF"/>
                 </a:solidFill>
@@ -12725,7 +12725,7 @@
               </a:rPr>
               <a:t>dimensioni, indirizzo</a:t>
             </a:r>
-            <a:endParaRPr lang="en-US" sz="1222" dirty="0"/>
+            <a:endParaRPr lang="en-US" sz="1598" dirty="0"/>
           </a:p>
         </p:txBody>
       </p:sp>
@@ -12754,7 +12754,7 @@
               <a:buNone/>
             </a:pPr>
             <a:r>
-              <a:rPr lang="en-US" sz="1022" dirty="0">
+              <a:rPr lang="en-US" sz="1398" dirty="0">
                 <a:solidFill>
                   <a:srgbClr val="5B6B78"/>
                 </a:solidFill>
@@ -12764,7 +12764,7 @@
               </a:rPr>
               <a:t>16 byte</a:t>
             </a:r>
-            <a:endParaRPr lang="en-US" sz="1022" dirty="0"/>
+            <a:endParaRPr lang="en-US" sz="1398" dirty="0"/>
           </a:p>
         </p:txBody>
       </p:sp>
@@ -12793,7 +12793,7 @@
               <a:buNone/>
             </a:pPr>
             <a:r>
-              <a:rPr lang="en-US" sz="1222" dirty="0">
+              <a:rPr lang="en-US" sz="1598" dirty="0">
                 <a:solidFill>
                   <a:srgbClr val="1B2530"/>
                 </a:solidFill>
@@ -12803,7 +12803,7 @@
               </a:rPr>
               <a:t>dove caricare il codice e quanto è grande</a:t>
             </a:r>
-            <a:endParaRPr lang="en-US" sz="1222" dirty="0"/>
+            <a:endParaRPr lang="en-US" sz="1598" dirty="0"/>
           </a:p>
         </p:txBody>
       </p:sp>
@@ -12832,7 +12832,7 @@
               <a:buNone/>
             </a:pPr>
             <a:r>
-              <a:rPr lang="en-US" sz="1022" dirty="0">
+              <a:rPr lang="en-US" sz="1398" dirty="0">
                 <a:solidFill>
                   <a:srgbClr val="5B6B78"/>
                 </a:solidFill>
@@ -12842,7 +12842,7 @@
               </a:rPr>
               <a:t>+24</a:t>
             </a:r>
-            <a:endParaRPr lang="en-US" sz="1022" dirty="0"/>
+            <a:endParaRPr lang="en-US" sz="1398" dirty="0"/>
           </a:p>
         </p:txBody>
       </p:sp>
@@ -12877,7 +12877,7 @@
               <a:buNone/>
             </a:pPr>
             <a:r>
-              <a:rPr lang="en-US" sz="1222" b="1" dirty="0">
+              <a:rPr lang="en-US" sz="1598" b="1" dirty="0">
                 <a:solidFill>
                   <a:srgbClr val="FFFFFF"/>
                 </a:solidFill>
@@ -12887,7 +12887,7 @@
               </a:rPr>
               <a:t>init / update / draw</a:t>
             </a:r>
-            <a:endParaRPr lang="en-US" sz="1222" dirty="0"/>
+            <a:endParaRPr lang="en-US" sz="1598" dirty="0"/>
           </a:p>
         </p:txBody>
       </p:sp>
@@ -12916,7 +12916,7 @@
               <a:buNone/>
             </a:pPr>
             <a:r>
-              <a:rPr lang="en-US" sz="1022" dirty="0">
+              <a:rPr lang="en-US" sz="1398" dirty="0">
                 <a:solidFill>
                   <a:srgbClr val="5B6B78"/>
                 </a:solidFill>
@@ -12926,7 +12926,7 @@
               </a:rPr>
               <a:t>12 byte</a:t>
             </a:r>
-            <a:endParaRPr lang="en-US" sz="1022" dirty="0"/>
+            <a:endParaRPr lang="en-US" sz="1398" dirty="0"/>
           </a:p>
         </p:txBody>
       </p:sp>
@@ -12955,7 +12955,7 @@
               <a:buNone/>
             </a:pPr>
             <a:r>
-              <a:rPr lang="en-US" sz="1222" dirty="0">
+              <a:rPr lang="en-US" sz="1598" dirty="0">
                 <a:solidFill>
                   <a:srgbClr val="1B2530"/>
                 </a:solidFill>
@@ -12965,7 +12965,7 @@
               </a:rPr>
               <a:t>dove iniziano le tre funzioni del gioco</a:t>
             </a:r>
-            <a:endParaRPr lang="en-US" sz="1222" dirty="0"/>
+            <a:endParaRPr lang="en-US" sz="1598" dirty="0"/>
           </a:p>
         </p:txBody>
       </p:sp>
@@ -12994,7 +12994,7 @@
               <a:buNone/>
             </a:pPr>
             <a:r>
-              <a:rPr lang="en-US" sz="1022" dirty="0">
+              <a:rPr lang="en-US" sz="1398" dirty="0">
                 <a:solidFill>
                   <a:srgbClr val="5B6B78"/>
                 </a:solidFill>
@@ -13004,7 +13004,7 @@
               </a:rPr>
               <a:t>+36</a:t>
             </a:r>
-            <a:endParaRPr lang="en-US" sz="1022" dirty="0"/>
+            <a:endParaRPr lang="en-US" sz="1398" dirty="0"/>
           </a:p>
         </p:txBody>
       </p:sp>
@@ -13039,7 +13039,7 @@
               <a:buNone/>
             </a:pPr>
             <a:r>
-              <a:rPr lang="en-US" sz="1222" b="1" dirty="0">
+              <a:rPr lang="en-US" sz="1598" b="1" dirty="0">
                 <a:solidFill>
                   <a:srgbClr val="FFFFFF"/>
                 </a:solidFill>
@@ -13049,7 +13049,7 @@
               </a:rPr>
               <a:t>CRC32</a:t>
             </a:r>
-            <a:endParaRPr lang="en-US" sz="1222" dirty="0"/>
+            <a:endParaRPr lang="en-US" sz="1598" dirty="0"/>
           </a:p>
         </p:txBody>
       </p:sp>
@@ -13078,7 +13078,7 @@
               <a:buNone/>
             </a:pPr>
             <a:r>
-              <a:rPr lang="en-US" sz="1022" dirty="0">
+              <a:rPr lang="en-US" sz="1398" dirty="0">
                 <a:solidFill>
                   <a:srgbClr val="5B6B78"/>
                 </a:solidFill>
@@ -13088,7 +13088,7 @@
               </a:rPr>
               <a:t>4 byte</a:t>
             </a:r>
-            <a:endParaRPr lang="en-US" sz="1022" dirty="0"/>
+            <a:endParaRPr lang="en-US" sz="1398" dirty="0"/>
           </a:p>
         </p:txBody>
       </p:sp>
@@ -13117,7 +13117,7 @@
               <a:buNone/>
             </a:pPr>
             <a:r>
-              <a:rPr lang="en-US" sz="1222" dirty="0">
+              <a:rPr lang="en-US" sz="1598" dirty="0">
                 <a:solidFill>
                   <a:srgbClr val="1B2530"/>
                 </a:solidFill>
@@ -13127,7 +13127,7 @@
               </a:rPr>
               <a:t>controllo: il file è arrivato intatto?</a:t>
             </a:r>
-            <a:endParaRPr lang="en-US" sz="1222" dirty="0"/>
+            <a:endParaRPr lang="en-US" sz="1598" dirty="0"/>
           </a:p>
         </p:txBody>
       </p:sp>
@@ -13156,7 +13156,7 @@
               <a:buNone/>
             </a:pPr>
             <a:r>
-              <a:rPr lang="en-US" sz="1022" dirty="0">
+              <a:rPr lang="en-US" sz="1398" dirty="0">
                 <a:solidFill>
                   <a:srgbClr val="5B6B78"/>
                 </a:solidFill>
@@ -13166,7 +13166,7 @@
               </a:rPr>
               <a:t>+40</a:t>
             </a:r>
-            <a:endParaRPr lang="en-US" sz="1022" dirty="0"/>
+            <a:endParaRPr lang="en-US" sz="1398" dirty="0"/>
           </a:p>
         </p:txBody>
       </p:sp>
@@ -13201,7 +13201,7 @@
               <a:buNone/>
             </a:pPr>
             <a:r>
-              <a:rPr lang="en-US" sz="1222" b="1" dirty="0">
+              <a:rPr lang="en-US" sz="1598" b="1" dirty="0">
                 <a:solidFill>
                   <a:srgbClr val="FFFFFF"/>
                 </a:solidFill>
@@ -13211,7 +13211,7 @@
               </a:rPr>
               <a:t>nome</a:t>
             </a:r>
-            <a:endParaRPr lang="en-US" sz="1222" dirty="0"/>
+            <a:endParaRPr lang="en-US" sz="1598" dirty="0"/>
           </a:p>
         </p:txBody>
       </p:sp>
@@ -13240,7 +13240,7 @@
               <a:buNone/>
             </a:pPr>
             <a:r>
-              <a:rPr lang="en-US" sz="1022" dirty="0">
+              <a:rPr lang="en-US" sz="1398" dirty="0">
                 <a:solidFill>
                   <a:srgbClr val="5B6B78"/>
                 </a:solidFill>
@@ -13250,7 +13250,7 @@
               </a:rPr>
               <a:t>32 byte</a:t>
             </a:r>
-            <a:endParaRPr lang="en-US" sz="1022" dirty="0"/>
+            <a:endParaRPr lang="en-US" sz="1398" dirty="0"/>
           </a:p>
         </p:txBody>
       </p:sp>
@@ -13279,7 +13279,7 @@
               <a:buNone/>
             </a:pPr>
             <a:r>
-              <a:rPr lang="en-US" sz="1222" dirty="0">
+              <a:rPr lang="en-US" sz="1598" dirty="0">
                 <a:solidFill>
                   <a:srgbClr val="1B2530"/>
                 </a:solidFill>
@@ -13289,7 +13289,7 @@
               </a:rPr>
               <a:t>quello che si legge nel menu</a:t>
             </a:r>
-            <a:endParaRPr lang="en-US" sz="1222" dirty="0"/>
+            <a:endParaRPr lang="en-US" sz="1598" dirty="0"/>
           </a:p>
         </p:txBody>
       </p:sp>
@@ -13318,7 +13318,7 @@
               <a:buNone/>
             </a:pPr>
             <a:r>
-              <a:rPr lang="en-US" sz="1022" dirty="0">
+              <a:rPr lang="en-US" sz="1398" dirty="0">
                 <a:solidFill>
                   <a:srgbClr val="5B6B78"/>
                 </a:solidFill>
@@ -13328,7 +13328,7 @@
               </a:rPr>
               <a:t>+72</a:t>
             </a:r>
-            <a:endParaRPr lang="en-US" sz="1022" dirty="0"/>
+            <a:endParaRPr lang="en-US" sz="1398" dirty="0"/>
           </a:p>
         </p:txBody>
       </p:sp>
@@ -13363,7 +13363,7 @@
               <a:buNone/>
             </a:pPr>
             <a:r>
-              <a:rPr lang="en-US" sz="1222" b="1" dirty="0">
+              <a:rPr lang="en-US" sz="1398" b="1" dirty="0">
                 <a:solidFill>
                   <a:srgbClr val="FFFFFF"/>
                 </a:solidFill>
@@ -13373,7 +13373,7 @@
               </a:rPr>
               <a:t>hash ABI, funzioni richieste</a:t>
             </a:r>
-            <a:endParaRPr lang="en-US" sz="1222" dirty="0"/>
+            <a:endParaRPr lang="en-US" sz="1398" dirty="0"/>
           </a:p>
         </p:txBody>
       </p:sp>
@@ -13402,7 +13402,7 @@
               <a:buNone/>
             </a:pPr>
             <a:r>
-              <a:rPr lang="en-US" sz="1022" dirty="0">
+              <a:rPr lang="en-US" sz="1398" dirty="0">
                 <a:solidFill>
                   <a:srgbClr val="5B6B78"/>
                 </a:solidFill>
@@ -13412,7 +13412,7 @@
               </a:rPr>
               <a:t>28 byte</a:t>
             </a:r>
-            <a:endParaRPr lang="en-US" sz="1022" dirty="0"/>
+            <a:endParaRPr lang="en-US" sz="1398" dirty="0"/>
           </a:p>
         </p:txBody>
       </p:sp>
@@ -13441,7 +13441,7 @@
               <a:buNone/>
             </a:pPr>
             <a:r>
-              <a:rPr lang="en-US" sz="1222" dirty="0">
+              <a:rPr lang="en-US" sz="1598" dirty="0">
                 <a:solidFill>
                   <a:srgbClr val="1B2530"/>
                 </a:solidFill>
@@ -13451,7 +13451,7 @@
               </a:rPr>
               <a:t>la console rifiuta ciò che non può eseguire</a:t>
             </a:r>
-            <a:endParaRPr lang="en-US" sz="1222" dirty="0"/>
+            <a:endParaRPr lang="en-US" sz="1598" dirty="0"/>
           </a:p>
         </p:txBody>
       </p:sp>
@@ -13479,7 +13479,7 @@
             <a:pPr algn="r" indent="0" marL="0">
               <a:buNone/>
             </a:pPr>
-            <a:endParaRPr lang="en-US" sz="1022" dirty="0"/>
+            <a:endParaRPr lang="en-US" sz="1398" dirty="0"/>
           </a:p>
         </p:txBody>
       </p:sp>
@@ -13514,7 +13514,7 @@
               <a:buNone/>
             </a:pPr>
             <a:r>
-              <a:rPr lang="en-US" sz="1222" b="1" dirty="0">
+              <a:rPr lang="en-US" sz="1598" b="1" dirty="0">
                 <a:solidFill>
                   <a:srgbClr val="FFFFFF"/>
                 </a:solidFill>
@@ -13524,7 +13524,7 @@
               </a:rPr>
               <a:t>codice e dati del gioco</a:t>
             </a:r>
-            <a:endParaRPr lang="en-US" sz="1222" dirty="0"/>
+            <a:endParaRPr lang="en-US" sz="1598" dirty="0"/>
           </a:p>
         </p:txBody>
       </p:sp>
@@ -13553,7 +13553,7 @@
               <a:buNone/>
             </a:pPr>
             <a:r>
-              <a:rPr lang="en-US" sz="1022" dirty="0">
+              <a:rPr lang="en-US" sz="1398" dirty="0">
                 <a:solidFill>
                   <a:srgbClr val="5B6B78"/>
                 </a:solidFill>
@@ -13563,7 +13563,7 @@
               </a:rPr>
               <a:t>~3,4 KiB</a:t>
             </a:r>
-            <a:endParaRPr lang="en-US" sz="1022" dirty="0"/>
+            <a:endParaRPr lang="en-US" sz="1398" dirty="0"/>
           </a:p>
         </p:txBody>
       </p:sp>
@@ -13592,7 +13592,7 @@
               <a:buNone/>
             </a:pPr>
             <a:r>
-              <a:rPr lang="en-US" sz="1222" dirty="0">
+              <a:rPr lang="en-US" sz="1598" dirty="0">
                 <a:solidFill>
                   <a:srgbClr val="1B2530"/>
                 </a:solidFill>
@@ -13602,7 +13602,7 @@
               </a:rPr>
               <a:t>le istruzioni RISC-V che scriviamo oggi</a:t>
             </a:r>
-            <a:endParaRPr lang="en-US" sz="1222" dirty="0"/>
+            <a:endParaRPr lang="en-US" sz="1598" dirty="0"/>
           </a:p>
         </p:txBody>
       </p:sp>
@@ -22171,7 +22171,7 @@
           </a:ln>
         </p:spPr>
         <p:txBody>
-          <a:bodyPr wrap="square" lIns="0" tIns="127000" rIns="101600" bIns="0" rtlCol="0" anchor="ctr"/>
+          <a:bodyPr wrap="square" lIns="88900" tIns="88900" rIns="88900" bIns="88900" rtlCol="0" anchor="ctr"/>
           <a:lstStyle/>
           <a:p>
             <a:pPr algn="l" indent="0" marL="0">
@@ -22218,7 +22218,7 @@
           </a:ln>
         </p:spPr>
         <p:txBody>
-          <a:bodyPr wrap="square" lIns="0" tIns="127000" rIns="101600" bIns="0" rtlCol="0" anchor="ctr"/>
+          <a:bodyPr wrap="square" lIns="88900" tIns="88900" rIns="88900" bIns="88900" rtlCol="0" anchor="ctr"/>
           <a:lstStyle/>
           <a:p>
             <a:pPr algn="l" indent="0" marL="0">
@@ -22265,7 +22265,7 @@
           </a:ln>
         </p:spPr>
         <p:txBody>
-          <a:bodyPr wrap="square" lIns="0" tIns="127000" rIns="101600" bIns="0" rtlCol="0" anchor="ctr"/>
+          <a:bodyPr wrap="square" lIns="88900" tIns="88900" rIns="88900" bIns="88900" rtlCol="0" anchor="ctr"/>
           <a:lstStyle/>
           <a:p>
             <a:pPr algn="l" indent="0" marL="0">
@@ -24698,7 +24698,7 @@
           </a:ln>
         </p:spPr>
         <p:txBody>
-          <a:bodyPr wrap="square" lIns="0" tIns="127000" rIns="101600" bIns="0" rtlCol="0" anchor="ctr"/>
+          <a:bodyPr wrap="square" lIns="88900" tIns="88900" rIns="88900" bIns="88900" rtlCol="0" anchor="ctr"/>
           <a:lstStyle/>
           <a:p>
             <a:pPr algn="l" indent="0" marL="0">
@@ -24745,7 +24745,7 @@
           </a:ln>
         </p:spPr>
         <p:txBody>
-          <a:bodyPr wrap="square" lIns="0" tIns="127000" rIns="101600" bIns="0" rtlCol="0" anchor="ctr"/>
+          <a:bodyPr wrap="square" lIns="88900" tIns="88900" rIns="88900" bIns="88900" rtlCol="0" anchor="ctr"/>
           <a:lstStyle/>
           <a:p>
             <a:pPr algn="l" indent="0" marL="0">
@@ -24792,7 +24792,7 @@
           </a:ln>
         </p:spPr>
         <p:txBody>
-          <a:bodyPr wrap="square" lIns="0" tIns="127000" rIns="101600" bIns="0" rtlCol="0" anchor="ctr"/>
+          <a:bodyPr wrap="square" lIns="88900" tIns="88900" rIns="88900" bIns="88900" rtlCol="0" anchor="ctr"/>
           <a:lstStyle/>
           <a:p>
             <a:pPr algn="l" indent="0" marL="0">
@@ -24839,7 +24839,7 @@
           </a:ln>
         </p:spPr>
         <p:txBody>
-          <a:bodyPr wrap="square" lIns="0" tIns="127000" rIns="101600" bIns="0" rtlCol="0" anchor="ctr"/>
+          <a:bodyPr wrap="square" lIns="88900" tIns="88900" rIns="88900" bIns="88900" rtlCol="0" anchor="ctr"/>
           <a:lstStyle/>
           <a:p>
             <a:pPr algn="l" indent="0" marL="0">
@@ -24886,7 +24886,7 @@
           </a:ln>
         </p:spPr>
         <p:txBody>
-          <a:bodyPr wrap="square" lIns="0" tIns="127000" rIns="101600" bIns="0" rtlCol="0" anchor="ctr"/>
+          <a:bodyPr wrap="square" lIns="88900" tIns="88900" rIns="88900" bIns="88900" rtlCol="0" anchor="ctr"/>
           <a:lstStyle/>
           <a:p>
             <a:pPr algn="l" indent="0" marL="0">
@@ -26071,7 +26071,7 @@
           </a:ln>
         </p:spPr>
         <p:txBody>
-          <a:bodyPr wrap="square" lIns="0" tIns="127000" rIns="101600" bIns="0" rtlCol="0" anchor="ctr"/>
+          <a:bodyPr wrap="square" lIns="88900" tIns="88900" rIns="88900" bIns="88900" rtlCol="0" anchor="ctr"/>
           <a:lstStyle/>
           <a:p>
             <a:pPr algn="l" indent="0" marL="0">
@@ -26118,7 +26118,7 @@
           </a:ln>
         </p:spPr>
         <p:txBody>
-          <a:bodyPr wrap="square" lIns="0" tIns="127000" rIns="101600" bIns="0" rtlCol="0" anchor="ctr"/>
+          <a:bodyPr wrap="square" lIns="88900" tIns="88900" rIns="88900" bIns="88900" rtlCol="0" anchor="ctr"/>
           <a:lstStyle/>
           <a:p>
             <a:pPr algn="l" indent="0" marL="0">
@@ -26165,7 +26165,7 @@
           </a:ln>
         </p:spPr>
         <p:txBody>
-          <a:bodyPr wrap="square" lIns="0" tIns="127000" rIns="101600" bIns="0" rtlCol="0" anchor="ctr"/>
+          <a:bodyPr wrap="square" lIns="88900" tIns="88900" rIns="88900" bIns="88900" rtlCol="0" anchor="ctr"/>
           <a:lstStyle/>
           <a:p>
             <a:pPr algn="l" indent="0" marL="0">
@@ -26212,7 +26212,7 @@
           </a:ln>
         </p:spPr>
         <p:txBody>
-          <a:bodyPr wrap="square" lIns="0" tIns="127000" rIns="101600" bIns="0" rtlCol="0" anchor="ctr"/>
+          <a:bodyPr wrap="square" lIns="88900" tIns="88900" rIns="88900" bIns="88900" rtlCol="0" anchor="ctr"/>
           <a:lstStyle/>
           <a:p>
             <a:pPr algn="l" indent="0" marL="0">
@@ -26259,7 +26259,7 @@
           </a:ln>
         </p:spPr>
         <p:txBody>
-          <a:bodyPr wrap="square" lIns="0" tIns="127000" rIns="101600" bIns="0" rtlCol="0" anchor="ctr"/>
+          <a:bodyPr wrap="square" lIns="88900" tIns="88900" rIns="88900" bIns="88900" rtlCol="0" anchor="ctr"/>
           <a:lstStyle/>
           <a:p>
             <a:pPr algn="l" indent="0" marL="0">
@@ -26306,7 +26306,7 @@
           </a:ln>
         </p:spPr>
         <p:txBody>
-          <a:bodyPr wrap="square" lIns="0" tIns="127000" rIns="101600" bIns="0" rtlCol="0" anchor="ctr"/>
+          <a:bodyPr wrap="square" lIns="88900" tIns="88900" rIns="88900" bIns="88900" rtlCol="0" anchor="ctr"/>
           <a:lstStyle/>
           <a:p>
             <a:pPr algn="l" indent="0" marL="0">
@@ -28322,7 +28322,7 @@
           </a:ln>
         </p:spPr>
         <p:txBody>
-          <a:bodyPr wrap="square" lIns="0" tIns="127000" rIns="101600" bIns="0" rtlCol="0" anchor="ctr"/>
+          <a:bodyPr wrap="square" lIns="88900" tIns="88900" rIns="88900" bIns="88900" rtlCol="0" anchor="ctr"/>
           <a:lstStyle/>
           <a:p>
             <a:pPr algn="l" indent="0" marL="0">
@@ -28369,7 +28369,7 @@
           </a:ln>
         </p:spPr>
         <p:txBody>
-          <a:bodyPr wrap="square" lIns="0" tIns="127000" rIns="101600" bIns="0" rtlCol="0" anchor="ctr"/>
+          <a:bodyPr wrap="square" lIns="88900" tIns="88900" rIns="88900" bIns="88900" rtlCol="0" anchor="ctr"/>
           <a:lstStyle/>
           <a:p>
             <a:pPr algn="l" indent="0" marL="0">
@@ -28416,7 +28416,7 @@
           </a:ln>
         </p:spPr>
         <p:txBody>
-          <a:bodyPr wrap="square" lIns="0" tIns="127000" rIns="101600" bIns="0" rtlCol="0" anchor="ctr"/>
+          <a:bodyPr wrap="square" lIns="88900" tIns="88900" rIns="88900" bIns="88900" rtlCol="0" anchor="ctr"/>
           <a:lstStyle/>
           <a:p>
             <a:pPr algn="l" indent="0" marL="0">
@@ -28463,7 +28463,7 @@
           </a:ln>
         </p:spPr>
         <p:txBody>
-          <a:bodyPr wrap="square" lIns="0" tIns="127000" rIns="101600" bIns="0" rtlCol="0" anchor="ctr"/>
+          <a:bodyPr wrap="square" lIns="88900" tIns="88900" rIns="88900" bIns="88900" rtlCol="0" anchor="ctr"/>
           <a:lstStyle/>
           <a:p>
             <a:pPr algn="l" indent="0" marL="0">
@@ -28510,7 +28510,7 @@
           </a:ln>
         </p:spPr>
         <p:txBody>
-          <a:bodyPr wrap="square" lIns="0" tIns="127000" rIns="101600" bIns="0" rtlCol="0" anchor="ctr"/>
+          <a:bodyPr wrap="square" lIns="88900" tIns="88900" rIns="88900" bIns="88900" rtlCol="0" anchor="ctr"/>
           <a:lstStyle/>
           <a:p>
             <a:pPr algn="l" indent="0" marL="0">
@@ -28557,7 +28557,7 @@
           </a:ln>
         </p:spPr>
         <p:txBody>
-          <a:bodyPr wrap="square" lIns="0" tIns="127000" rIns="101600" bIns="0" rtlCol="0" anchor="ctr"/>
+          <a:bodyPr wrap="square" lIns="88900" tIns="88900" rIns="88900" bIns="88900" rtlCol="0" anchor="ctr"/>
           <a:lstStyle/>
           <a:p>
             <a:pPr algn="l" indent="0" marL="0">
@@ -28604,7 +28604,7 @@
           </a:ln>
         </p:spPr>
         <p:txBody>
-          <a:bodyPr wrap="square" lIns="0" tIns="127000" rIns="101600" bIns="0" rtlCol="0" anchor="ctr"/>
+          <a:bodyPr wrap="square" lIns="88900" tIns="88900" rIns="88900" bIns="88900" rtlCol="0" anchor="ctr"/>
           <a:lstStyle/>
           <a:p>
             <a:pPr algn="l" indent="0" marL="0">
@@ -28651,7 +28651,7 @@
           </a:ln>
         </p:spPr>
         <p:txBody>
-          <a:bodyPr wrap="square" lIns="0" tIns="127000" rIns="101600" bIns="0" rtlCol="0" anchor="ctr"/>
+          <a:bodyPr wrap="square" lIns="88900" tIns="88900" rIns="88900" bIns="88900" rtlCol="0" anchor="ctr"/>
           <a:lstStyle/>
           <a:p>
             <a:pPr algn="l" indent="0" marL="0">
@@ -30633,7 +30633,7 @@
           </a:ln>
         </p:spPr>
         <p:txBody>
-          <a:bodyPr wrap="square" lIns="0" tIns="127000" rIns="101600" bIns="0" rtlCol="0" anchor="ctr"/>
+          <a:bodyPr wrap="square" lIns="88900" tIns="88900" rIns="88900" bIns="88900" rtlCol="0" anchor="ctr"/>
           <a:lstStyle/>
           <a:p>
             <a:pPr algn="l" indent="0" marL="0">
@@ -30680,7 +30680,7 @@
           </a:ln>
         </p:spPr>
         <p:txBody>
-          <a:bodyPr wrap="square" lIns="0" tIns="127000" rIns="101600" bIns="0" rtlCol="0" anchor="ctr"/>
+          <a:bodyPr wrap="square" lIns="88900" tIns="88900" rIns="88900" bIns="88900" rtlCol="0" anchor="ctr"/>
           <a:lstStyle/>
           <a:p>
             <a:pPr algn="l" indent="0" marL="0">
@@ -31865,7 +31865,7 @@
           </a:ln>
         </p:spPr>
         <p:txBody>
-          <a:bodyPr wrap="square" lIns="0" tIns="127000" rIns="101600" bIns="0" rtlCol="0" anchor="ctr"/>
+          <a:bodyPr wrap="square" lIns="88900" tIns="88900" rIns="88900" bIns="88900" rtlCol="0" anchor="ctr"/>
           <a:lstStyle/>
           <a:p>
             <a:pPr algn="l" indent="0" marL="0">
@@ -31912,7 +31912,7 @@
           </a:ln>
         </p:spPr>
         <p:txBody>
-          <a:bodyPr wrap="square" lIns="0" tIns="127000" rIns="101600" bIns="0" rtlCol="0" anchor="ctr"/>
+          <a:bodyPr wrap="square" lIns="88900" tIns="88900" rIns="88900" bIns="88900" rtlCol="0" anchor="ctr"/>
           <a:lstStyle/>
           <a:p>
             <a:pPr algn="l" indent="0" marL="0">
@@ -31959,7 +31959,7 @@
           </a:ln>
         </p:spPr>
         <p:txBody>
-          <a:bodyPr wrap="square" lIns="0" tIns="127000" rIns="101600" bIns="0" rtlCol="0" anchor="ctr"/>
+          <a:bodyPr wrap="square" lIns="88900" tIns="88900" rIns="88900" bIns="88900" rtlCol="0" anchor="ctr"/>
           <a:lstStyle/>
           <a:p>
             <a:pPr algn="l" indent="0" marL="0">
@@ -32006,7 +32006,7 @@
           </a:ln>
         </p:spPr>
         <p:txBody>
-          <a:bodyPr wrap="square" lIns="0" tIns="127000" rIns="101600" bIns="0" rtlCol="0" anchor="ctr"/>
+          <a:bodyPr wrap="square" lIns="88900" tIns="88900" rIns="88900" bIns="88900" rtlCol="0" anchor="ctr"/>
           <a:lstStyle/>
           <a:p>
             <a:pPr algn="l" indent="0" marL="0">
@@ -32053,7 +32053,7 @@
           </a:ln>
         </p:spPr>
         <p:txBody>
-          <a:bodyPr wrap="square" lIns="0" tIns="127000" rIns="101600" bIns="0" rtlCol="0" anchor="ctr"/>
+          <a:bodyPr wrap="square" lIns="88900" tIns="88900" rIns="88900" bIns="88900" rtlCol="0" anchor="ctr"/>
           <a:lstStyle/>
           <a:p>
             <a:pPr algn="l" indent="0" marL="0">
@@ -33238,7 +33238,7 @@
           </a:ln>
         </p:spPr>
         <p:txBody>
-          <a:bodyPr wrap="square" lIns="0" tIns="127000" rIns="101600" bIns="0" rtlCol="0" anchor="ctr"/>
+          <a:bodyPr wrap="square" lIns="88900" tIns="88900" rIns="88900" bIns="88900" rtlCol="0" anchor="ctr"/>
           <a:lstStyle/>
           <a:p>
             <a:pPr algn="l" indent="0" marL="0">
@@ -33285,7 +33285,7 @@
           </a:ln>
         </p:spPr>
         <p:txBody>
-          <a:bodyPr wrap="square" lIns="0" tIns="127000" rIns="101600" bIns="0" rtlCol="0" anchor="ctr"/>
+          <a:bodyPr wrap="square" lIns="88900" tIns="88900" rIns="88900" bIns="88900" rtlCol="0" anchor="ctr"/>
           <a:lstStyle/>
           <a:p>
             <a:pPr algn="l" indent="0" marL="0">
@@ -33332,7 +33332,7 @@
           </a:ln>
         </p:spPr>
         <p:txBody>
-          <a:bodyPr wrap="square" lIns="0" tIns="127000" rIns="101600" bIns="0" rtlCol="0" anchor="ctr"/>
+          <a:bodyPr wrap="square" lIns="88900" tIns="88900" rIns="88900" bIns="88900" rtlCol="0" anchor="ctr"/>
           <a:lstStyle/>
           <a:p>
             <a:pPr algn="l" indent="0" marL="0">
@@ -33379,7 +33379,7 @@
           </a:ln>
         </p:spPr>
         <p:txBody>
-          <a:bodyPr wrap="square" lIns="0" tIns="127000" rIns="101600" bIns="0" rtlCol="0" anchor="ctr"/>
+          <a:bodyPr wrap="square" lIns="88900" tIns="88900" rIns="88900" bIns="88900" rtlCol="0" anchor="ctr"/>
           <a:lstStyle/>
           <a:p>
             <a:pPr algn="l" indent="0" marL="0">
@@ -33426,7 +33426,7 @@
           </a:ln>
         </p:spPr>
         <p:txBody>
-          <a:bodyPr wrap="square" lIns="0" tIns="127000" rIns="101600" bIns="0" rtlCol="0" anchor="ctr"/>
+          <a:bodyPr wrap="square" lIns="88900" tIns="88900" rIns="88900" bIns="88900" rtlCol="0" anchor="ctr"/>
           <a:lstStyle/>
           <a:p>
             <a:pPr algn="l" indent="0" marL="0">
@@ -33473,7 +33473,7 @@
           </a:ln>
         </p:spPr>
         <p:txBody>
-          <a:bodyPr wrap="square" lIns="0" tIns="127000" rIns="101600" bIns="0" rtlCol="0" anchor="ctr"/>
+          <a:bodyPr wrap="square" lIns="88900" tIns="88900" rIns="88900" bIns="88900" rtlCol="0" anchor="ctr"/>
           <a:lstStyle/>
           <a:p>
             <a:pPr algn="l" indent="0" marL="0">
@@ -34744,7 +34744,7 @@
           </a:ln>
         </p:spPr>
         <p:txBody>
-          <a:bodyPr wrap="square" lIns="0" tIns="127000" rIns="101600" bIns="0" rtlCol="0" anchor="ctr"/>
+          <a:bodyPr wrap="square" lIns="88900" tIns="88900" rIns="88900" bIns="88900" rtlCol="0" anchor="ctr"/>
           <a:lstStyle/>
           <a:p>
             <a:pPr algn="l" indent="0" marL="0">
@@ -34791,7 +34791,7 @@
           </a:ln>
         </p:spPr>
         <p:txBody>
-          <a:bodyPr wrap="square" lIns="0" tIns="127000" rIns="101600" bIns="0" rtlCol="0" anchor="ctr"/>
+          <a:bodyPr wrap="square" lIns="88900" tIns="88900" rIns="88900" bIns="88900" rtlCol="0" anchor="ctr"/>
           <a:lstStyle/>
           <a:p>
             <a:pPr algn="l" indent="0" marL="0">
@@ -34838,7 +34838,7 @@
           </a:ln>
         </p:spPr>
         <p:txBody>
-          <a:bodyPr wrap="square" lIns="0" tIns="127000" rIns="101600" bIns="0" rtlCol="0" anchor="ctr"/>
+          <a:bodyPr wrap="square" lIns="88900" tIns="88900" rIns="88900" bIns="88900" rtlCol="0" anchor="ctr"/>
           <a:lstStyle/>
           <a:p>
             <a:pPr algn="l" indent="0" marL="0">
@@ -34885,7 +34885,7 @@
           </a:ln>
         </p:spPr>
         <p:txBody>
-          <a:bodyPr wrap="square" lIns="0" tIns="127000" rIns="101600" bIns="0" rtlCol="0" anchor="ctr"/>
+          <a:bodyPr wrap="square" lIns="88900" tIns="88900" rIns="88900" bIns="88900" rtlCol="0" anchor="ctr"/>
           <a:lstStyle/>
           <a:p>
             <a:pPr algn="l" indent="0" marL="0">
@@ -34932,7 +34932,7 @@
           </a:ln>
         </p:spPr>
         <p:txBody>
-          <a:bodyPr wrap="square" lIns="0" tIns="127000" rIns="101600" bIns="0" rtlCol="0" anchor="ctr"/>
+          <a:bodyPr wrap="square" lIns="88900" tIns="88900" rIns="88900" bIns="88900" rtlCol="0" anchor="ctr"/>
           <a:lstStyle/>
           <a:p>
             <a:pPr algn="l" indent="0" marL="0">
@@ -36410,7 +36410,7 @@
               <a:buNone/>
             </a:pPr>
             <a:r>
-              <a:rPr lang="en-US" sz="1150" dirty="0">
+              <a:rPr lang="en-US" sz="1300" dirty="0">
                 <a:solidFill>
                   <a:srgbClr val="E6EDF2"/>
                 </a:solidFill>
@@ -36420,14 +36420,14 @@
               </a:rPr>
               <a:t>void breakout_update(void) {</a:t>
             </a:r>
-            <a:endParaRPr lang="en-US" sz="1150" dirty="0"/>
+            <a:endParaRPr lang="en-US" sz="1300" dirty="0"/>
           </a:p>
           <a:p>
             <a:pPr indent="0" marL="0">
               <a:buNone/>
             </a:pPr>
             <a:r>
-              <a:rPr lang="en-US" sz="1150" dirty="0">
+              <a:rPr lang="en-US" sz="1300" dirty="0">
                 <a:solidFill>
                   <a:srgbClr val="E6EDF2"/>
                 </a:solidFill>
@@ -36437,14 +36437,14 @@
               </a:rPr>
               <a:t>    uint32_t input = prg32_input_read();</a:t>
             </a:r>
-            <a:endParaRPr lang="en-US" sz="1150" dirty="0"/>
+            <a:endParaRPr lang="en-US" sz="1300" dirty="0"/>
           </a:p>
           <a:p>
             <a:pPr indent="0" marL="0">
               <a:buNone/>
             </a:pPr>
             <a:r>
-              <a:rPr lang="en-US" sz="1150" dirty="0">
+              <a:rPr lang="en-US" sz="1300" dirty="0">
                 <a:solidFill>
                   <a:srgbClr val="E6EDF2"/>
                 </a:solidFill>
@@ -36454,14 +36454,14 @@
               </a:rPr>
               <a:t>    if (input &amp; PRG32_BTN_LEFT) {</a:t>
             </a:r>
-            <a:endParaRPr lang="en-US" sz="1150" dirty="0"/>
+            <a:endParaRPr lang="en-US" sz="1300" dirty="0"/>
           </a:p>
           <a:p>
             <a:pPr indent="0" marL="0">
               <a:buNone/>
             </a:pPr>
             <a:r>
-              <a:rPr lang="en-US" sz="1150" dirty="0">
+              <a:rPr lang="en-US" sz="1300" dirty="0">
                 <a:solidFill>
                   <a:srgbClr val="E6EDF2"/>
                 </a:solidFill>
@@ -36471,14 +36471,14 @@
               </a:rPr>
               <a:t>        paddle_x += -4;</a:t>
             </a:r>
-            <a:endParaRPr lang="en-US" sz="1150" dirty="0"/>
+            <a:endParaRPr lang="en-US" sz="1300" dirty="0"/>
           </a:p>
           <a:p>
             <a:pPr indent="0" marL="0">
               <a:buNone/>
             </a:pPr>
             <a:r>
-              <a:rPr lang="en-US" sz="1150" dirty="0">
+              <a:rPr lang="en-US" sz="1300" dirty="0">
                 <a:solidFill>
                   <a:srgbClr val="E6EDF2"/>
                 </a:solidFill>
@@ -36488,14 +36488,14 @@
               </a:rPr>
               <a:t>    }</a:t>
             </a:r>
-            <a:endParaRPr lang="en-US" sz="1150" dirty="0"/>
+            <a:endParaRPr lang="en-US" sz="1300" dirty="0"/>
           </a:p>
           <a:p>
             <a:pPr indent="0" marL="0">
               <a:buNone/>
             </a:pPr>
             <a:r>
-              <a:rPr lang="en-US" sz="1150" dirty="0">
+              <a:rPr lang="en-US" sz="1300" dirty="0">
                 <a:solidFill>
                   <a:srgbClr val="E6EDF2"/>
                 </a:solidFill>
@@ -36505,14 +36505,14 @@
               </a:rPr>
               <a:t>    if (input &amp; PRG32_BTN_RIGHT) {</a:t>
             </a:r>
-            <a:endParaRPr lang="en-US" sz="1150" dirty="0"/>
+            <a:endParaRPr lang="en-US" sz="1300" dirty="0"/>
           </a:p>
           <a:p>
             <a:pPr indent="0" marL="0">
               <a:buNone/>
             </a:pPr>
             <a:r>
-              <a:rPr lang="en-US" sz="1150" dirty="0">
+              <a:rPr lang="en-US" sz="1300" dirty="0">
                 <a:solidFill>
                   <a:srgbClr val="E6EDF2"/>
                 </a:solidFill>
@@ -36522,14 +36522,14 @@
               </a:rPr>
               <a:t>        paddle_x += 4;</a:t>
             </a:r>
-            <a:endParaRPr lang="en-US" sz="1150" dirty="0"/>
+            <a:endParaRPr lang="en-US" sz="1300" dirty="0"/>
           </a:p>
           <a:p>
             <a:pPr indent="0" marL="0">
               <a:buNone/>
             </a:pPr>
             <a:r>
-              <a:rPr lang="en-US" sz="1150" dirty="0">
+              <a:rPr lang="en-US" sz="1300" dirty="0">
                 <a:solidFill>
                   <a:srgbClr val="E6EDF2"/>
                 </a:solidFill>
@@ -36539,14 +36539,14 @@
               </a:rPr>
               <a:t>    }</a:t>
             </a:r>
-            <a:endParaRPr lang="en-US" sz="1150" dirty="0"/>
+            <a:endParaRPr lang="en-US" sz="1300" dirty="0"/>
           </a:p>
           <a:p>
             <a:pPr indent="0" marL="0">
               <a:buNone/>
             </a:pPr>
             <a:r>
-              <a:rPr lang="en-US" sz="1150" dirty="0">
+              <a:rPr lang="en-US" sz="1300" dirty="0">
                 <a:solidFill>
                   <a:srgbClr val="E6EDF2"/>
                 </a:solidFill>
@@ -36556,14 +36556,14 @@
               </a:rPr>
               <a:t>    if (paddle_x &lt; 0) { paddle_x = 0; }</a:t>
             </a:r>
-            <a:endParaRPr lang="en-US" sz="1150" dirty="0"/>
+            <a:endParaRPr lang="en-US" sz="1300" dirty="0"/>
           </a:p>
           <a:p>
             <a:pPr indent="0" marL="0">
               <a:buNone/>
             </a:pPr>
             <a:r>
-              <a:rPr lang="en-US" sz="1150" dirty="0">
+              <a:rPr lang="en-US" sz="1300" dirty="0">
                 <a:solidFill>
                   <a:srgbClr val="E6EDF2"/>
                 </a:solidFill>
@@ -36573,14 +36573,14 @@
               </a:rPr>
               <a:t>    if (paddle_x &gt; 272) { paddle_x = 272; }</a:t>
             </a:r>
-            <a:endParaRPr lang="en-US" sz="1150" dirty="0"/>
+            <a:endParaRPr lang="en-US" sz="1300" dirty="0"/>
           </a:p>
           <a:p>
             <a:pPr indent="0" marL="0">
               <a:buNone/>
             </a:pPr>
             <a:r>
-              <a:rPr lang="en-US" sz="1150" dirty="0">
+              <a:rPr lang="en-US" sz="1300" dirty="0">
                 <a:solidFill>
                   <a:srgbClr val="E6EDF2"/>
                 </a:solidFill>
@@ -36594,7 +36594,7 @@
               <a:buNone/>
             </a:pPr>
             <a:r>
-              <a:rPr lang="en-US" sz="1150" dirty="0">
+              <a:rPr lang="en-US" sz="1300" dirty="0">
                 <a:solidFill>
                   <a:srgbClr val="8FB3A0"/>
                 </a:solidFill>
@@ -36604,14 +36604,14 @@
               </a:rPr>
               <a:t>/* La pallina si muove: posizione + velocita */</a:t>
             </a:r>
-            <a:endParaRPr lang="en-US" sz="1150" dirty="0"/>
+            <a:endParaRPr lang="en-US" sz="1300" dirty="0"/>
           </a:p>
           <a:p>
             <a:pPr indent="0" marL="0">
               <a:buNone/>
             </a:pPr>
             <a:r>
-              <a:rPr lang="en-US" sz="1150" dirty="0">
+              <a:rPr lang="en-US" sz="1300" dirty="0">
                 <a:solidFill>
                   <a:srgbClr val="E6EDF2"/>
                 </a:solidFill>
@@ -36621,14 +36621,14 @@
               </a:rPr>
               <a:t>    ball_x += ball_dx;</a:t>
             </a:r>
-            <a:endParaRPr lang="en-US" sz="1150" dirty="0"/>
+            <a:endParaRPr lang="en-US" sz="1300" dirty="0"/>
           </a:p>
           <a:p>
             <a:pPr indent="0" marL="0">
               <a:buNone/>
             </a:pPr>
             <a:r>
-              <a:rPr lang="en-US" sz="1150" dirty="0">
+              <a:rPr lang="en-US" sz="1300" dirty="0">
                 <a:solidFill>
                   <a:srgbClr val="E6EDF2"/>
                 </a:solidFill>
@@ -36638,14 +36638,14 @@
               </a:rPr>
               <a:t>    ball_y += ball_dy;</a:t>
             </a:r>
-            <a:endParaRPr lang="en-US" sz="1150" dirty="0"/>
+            <a:endParaRPr lang="en-US" sz="1300" dirty="0"/>
           </a:p>
           <a:p>
             <a:pPr indent="0" marL="0">
               <a:buNone/>
             </a:pPr>
             <a:r>
-              <a:rPr lang="en-US" sz="1150" dirty="0">
+              <a:rPr lang="en-US" sz="1300" dirty="0">
                 <a:solidFill>
                   <a:srgbClr val="E6EDF2"/>
                 </a:solidFill>
@@ -36659,7 +36659,7 @@
               <a:buNone/>
             </a:pPr>
             <a:r>
-              <a:rPr lang="en-US" sz="1150" dirty="0">
+              <a:rPr lang="en-US" sz="1300" dirty="0">
                 <a:solidFill>
                   <a:srgbClr val="8FB3A0"/>
                 </a:solidFill>
@@ -36669,14 +36669,14 @@
               </a:rPr>
               <a:t>/* I muri sono rettangoli appena fuori dallo schermo */</a:t>
             </a:r>
-            <a:endParaRPr lang="en-US" sz="1150" dirty="0"/>
+            <a:endParaRPr lang="en-US" sz="1300" dirty="0"/>
           </a:p>
           <a:p>
             <a:pPr indent="0" marL="0">
               <a:buNone/>
             </a:pPr>
             <a:r>
-              <a:rPr lang="en-US" sz="1150" dirty="0">
+              <a:rPr lang="en-US" sz="1300" dirty="0">
                 <a:solidFill>
                   <a:srgbClr val="E6EDF2"/>
                 </a:solidFill>
@@ -36684,16 +36684,16 @@
                 <a:ea typeface="Courier New" pitchFamily="34" charset="-122"/>
                 <a:cs typeface="Courier New" pitchFamily="34" charset="-120"/>
               </a:rPr>
-              <a:t>    if (prg32_sprite_hitbox(ball_x, ball_y, 6, 6, -10, 0, 10, 200)) {</a:t>
-            </a:r>
-            <a:endParaRPr lang="en-US" sz="1150" dirty="0"/>
+              <a:t>    if (prg32_sprite_hitbox(ball_x, ball_y, 6, 6, -10, 0, 10,</a:t>
+            </a:r>
+            <a:endParaRPr lang="en-US" sz="1300" dirty="0"/>
           </a:p>
           <a:p>
             <a:pPr indent="0" marL="0">
               <a:buNone/>
             </a:pPr>
             <a:r>
-              <a:rPr lang="en-US" sz="1150" dirty="0">
+              <a:rPr lang="en-US" sz="1300" dirty="0">
                 <a:solidFill>
                   <a:srgbClr val="E6EDF2"/>
                 </a:solidFill>
@@ -36701,16 +36701,16 @@
                 <a:ea typeface="Courier New" pitchFamily="34" charset="-122"/>
                 <a:cs typeface="Courier New" pitchFamily="34" charset="-120"/>
               </a:rPr>
-              <a:t>        ball_dx = 2;</a:t>
-            </a:r>
-            <a:endParaRPr lang="en-US" sz="1150" dirty="0"/>
+              <a:t>        200)) {</a:t>
+            </a:r>
+            <a:endParaRPr lang="en-US" sz="1300" dirty="0"/>
           </a:p>
           <a:p>
             <a:pPr indent="0" marL="0">
               <a:buNone/>
             </a:pPr>
             <a:r>
-              <a:rPr lang="en-US" sz="1150" dirty="0">
+              <a:rPr lang="en-US" sz="1300" dirty="0">
                 <a:solidFill>
                   <a:srgbClr val="E6EDF2"/>
                 </a:solidFill>
@@ -36718,16 +36718,16 @@
                 <a:ea typeface="Courier New" pitchFamily="34" charset="-122"/>
                 <a:cs typeface="Courier New" pitchFamily="34" charset="-120"/>
               </a:rPr>
-              <a:t>    }</a:t>
-            </a:r>
-            <a:endParaRPr lang="en-US" sz="1150" dirty="0"/>
+              <a:t>        ball_dx = 2;</a:t>
+            </a:r>
+            <a:endParaRPr lang="en-US" sz="1300" dirty="0"/>
           </a:p>
           <a:p>
             <a:pPr indent="0" marL="0">
               <a:buNone/>
             </a:pPr>
             <a:r>
-              <a:rPr lang="en-US" sz="1150" dirty="0">
+              <a:rPr lang="en-US" sz="1300" dirty="0">
                 <a:solidFill>
                   <a:srgbClr val="E6EDF2"/>
                 </a:solidFill>
@@ -36735,9 +36735,43 @@
                 <a:ea typeface="Courier New" pitchFamily="34" charset="-122"/>
                 <a:cs typeface="Courier New" pitchFamily="34" charset="-120"/>
               </a:rPr>
-              <a:t>    if (prg32_sprite_hitbox(ball_x, ball_y, 6, 6, 320, 0, 10, 200)) {</a:t>
-            </a:r>
-            <a:endParaRPr lang="en-US" sz="1150" dirty="0"/>
+              <a:t>    }</a:t>
+            </a:r>
+            <a:endParaRPr lang="en-US" sz="1300" dirty="0"/>
+          </a:p>
+          <a:p>
+            <a:pPr indent="0" marL="0">
+              <a:buNone/>
+            </a:pPr>
+            <a:r>
+              <a:rPr lang="en-US" sz="1300" dirty="0">
+                <a:solidFill>
+                  <a:srgbClr val="E6EDF2"/>
+                </a:solidFill>
+                <a:latin typeface="Courier New" pitchFamily="34" charset="0"/>
+                <a:ea typeface="Courier New" pitchFamily="34" charset="-122"/>
+                <a:cs typeface="Courier New" pitchFamily="34" charset="-120"/>
+              </a:rPr>
+              <a:t>    if (prg32_sprite_hitbox(ball_x, ball_y, 6, 6, 320, 0, 10,</a:t>
+            </a:r>
+            <a:endParaRPr lang="en-US" sz="1300" dirty="0"/>
+          </a:p>
+          <a:p>
+            <a:pPr indent="0" marL="0">
+              <a:buNone/>
+            </a:pPr>
+            <a:r>
+              <a:rPr lang="en-US" sz="1300" dirty="0">
+                <a:solidFill>
+                  <a:srgbClr val="E6EDF2"/>
+                </a:solidFill>
+                <a:latin typeface="Courier New" pitchFamily="34" charset="0"/>
+                <a:ea typeface="Courier New" pitchFamily="34" charset="-122"/>
+                <a:cs typeface="Courier New" pitchFamily="34" charset="-120"/>
+              </a:rPr>
+              <a:t>        200)) {</a:t>
+            </a:r>
+            <a:endParaRPr lang="en-US" sz="1300" dirty="0"/>
           </a:p>
         </p:txBody>
       </p:sp>
